--- a/cursos/recursos/arbitro-nacional/03-puesta-en-marcha-incrementos-y-las-obligaciones-que-cambian-con-el-control-de-tiempo.pptx
+++ b/cursos/recursos/arbitro-nacional/03-puesta-en-marcha-incrementos-y-las-obligaciones-que-cambian-con-el-control-de-tiempo.pptx
@@ -3712,7 +3712,7 @@
                 </a:solidFill>
                 <a:latin typeface="Calibri"/>
               </a:rPr>
-              <a:t>El reloj se pone en marcha con la jugada del segundo jugador (art. 6.1): las blancas pueden empezar a pensar antes de que el reloj corra, pero el tiempo de las negras no arranca hasta que las blancas mueven y presionan. Esto importa en incomparecencias: el reloj del ausente corre desde la hora fijada, no desde que llega el rival.</a:t>
+              <a:t>El reloj de las blancas se pone en marcha a la hora fijada de inicio de la ronda (art. 6.6), esté o no la persona jugadora sentada en su mesa — no espera a que ambos estén presentes ni a la primera jugada. Esto es justo lo que hace posible el artículo 6.7 de incomparecencia: el reloj del ausente corre desde ese momento, así que su tiempo se va gastando aunque no haya llegado.</a:t>
             </a:r>
           </a:p>
         </p:txBody>
